--- a/docs/営業改革グランドデザイン_経営幹部説明版.pptx
+++ b/docs/営業改革グランドデザイン_経営幹部説明版.pptx
@@ -31345,52 +31345,30 @@
           </a:p>
         </p:txBody>
       </p:sp>
-      <p:sp>
-        <p:nvSpPr>
-          <p:cNvPr id="5" name="Rounded Rectangle 4"/>
-          <p:cNvSpPr/>
-          <p:nvPr/>
-        </p:nvSpPr>
-        <p:spPr>
-          <a:xfrm>
-            <a:off x="8412480" y="1828800"/>
-            <a:ext cx="3200400" cy="3657600"/>
-          </a:xfrm>
-          <a:prstGeom prst="roundRect">
-            <a:avLst/>
-          </a:prstGeom>
-          <a:solidFill>
-            <a:srgbClr val="F7F7F9"/>
-          </a:solidFill>
-          <a:ln w="15240">
-            <a:solidFill>
-              <a:srgbClr val="D9D9E0"/>
-            </a:solidFill>
-          </a:ln>
-          <a:effectLst/>
-        </p:spPr>
-        <p:style>
-          <a:lnRef idx="1">
-            <a:schemeClr val="accent1"/>
-          </a:lnRef>
-          <a:fillRef idx="3">
-            <a:schemeClr val="accent1"/>
-          </a:fillRef>
-          <a:effectRef idx="2">
-            <a:schemeClr val="accent1"/>
-          </a:effectRef>
-          <a:fontRef idx="minor">
-            <a:schemeClr val="lt1"/>
-          </a:fontRef>
-        </p:style>
-        <p:txBody>
-          <a:bodyPr rtlCol="0" anchor="ctr"/>
-          <a:lstStyle/>
-          <a:p>
-            <a:pPr algn="ctr"/>
-          </a:p>
-        </p:txBody>
-      </p:sp>
+      <p:pic>
+        <p:nvPicPr>
+          <p:cNvPr id="5" name="Picture 4" descr="photo_crop.png"/>
+          <p:cNvPicPr>
+            <a:picLocks noChangeAspect="1"/>
+          </p:cNvPicPr>
+          <p:nvPr/>
+        </p:nvPicPr>
+        <p:blipFill>
+          <a:blip r:embed="rId2"/>
+          <a:stretch>
+            <a:fillRect/>
+          </a:stretch>
+        </p:blipFill>
+        <p:spPr>
+          <a:xfrm>
+            <a:off x="1051560" y="1828800"/>
+            <a:ext cx="1920240" cy="2173857"/>
+          </a:xfrm>
+          <a:prstGeom prst="rect">
+            <a:avLst/>
+          </a:prstGeom>
+        </p:spPr>
+      </p:pic>
       <p:sp>
         <p:nvSpPr>
           <p:cNvPr id="6" name="TextBox 5"/>
@@ -31399,8 +31377,8 @@
         </p:nvSpPr>
         <p:spPr>
           <a:xfrm>
-            <a:off x="8412480" y="1828800"/>
-            <a:ext cx="3200400" cy="3657600"/>
+            <a:off x="640080" y="3977639"/>
+            <a:ext cx="2743200" cy="1280160"/>
           </a:xfrm>
           <a:prstGeom prst="rect">
             <a:avLst/>
@@ -31408,7 +31386,7 @@
           <a:noFill/>
         </p:spPr>
         <p:txBody>
-          <a:bodyPr wrap="square" lIns="0" rIns="0" tIns="0" bIns="0" anchor="ctr">
+          <a:bodyPr wrap="square" lIns="0" rIns="0" tIns="0" bIns="0" anchor="t">
             <a:spAutoFit/>
           </a:bodyPr>
           <a:lstStyle/>
@@ -31419,7 +31397,25 @@
               </a:spcAft>
             </a:pPr>
             <a:r>
-              <a:rPr sz="1400" b="1" i="0">
+              <a:rPr sz="1800" b="1" i="0">
+                <a:solidFill>
+                  <a:srgbClr val="262630"/>
+                </a:solidFill>
+                <a:latin typeface="Yu Gothic"/>
+                <a:ea typeface="Yu Gothic"/>
+                <a:cs typeface="Yu Gothic"/>
+              </a:rPr>
+              <a:t>新谷 隼人</a:t>
+            </a:r>
+          </a:p>
+          <a:p>
+            <a:pPr algn="ctr">
+              <a:spcAft>
+                <a:spcPts val="300"/>
+              </a:spcAft>
+            </a:pPr>
+            <a:r>
+              <a:rPr sz="1050" b="0" i="0">
                 <a:solidFill>
                   <a:srgbClr val="8A8A99"/>
                 </a:solidFill>
@@ -31427,7 +31423,7 @@
                 <a:ea typeface="Yu Gothic"/>
                 <a:cs typeface="Yu Gothic"/>
               </a:rPr>
-              <a:t>写真</a:t>
+              <a:t>Shintani Hayato</a:t>
             </a:r>
           </a:p>
           <a:p>
@@ -31437,7 +31433,7 @@
               </a:spcAft>
             </a:pPr>
             <a:r>
-              <a:rPr sz="950" b="0" i="0">
+              <a:rPr sz="400" b="0" i="0">
                 <a:solidFill>
                   <a:srgbClr val="8A8A99"/>
                 </a:solidFill>
@@ -31445,7 +31441,7 @@
                 <a:ea typeface="Yu Gothic"/>
                 <a:cs typeface="Yu Gothic"/>
               </a:rPr>
-              <a:t>（自己紹介スライドの画像に</a:t>
+              <a:t/>
             </a:r>
           </a:p>
           <a:p>
@@ -31455,15 +31451,33 @@
               </a:spcAft>
             </a:pPr>
             <a:r>
-              <a:rPr sz="950" b="0" i="0">
-                <a:solidFill>
-                  <a:srgbClr val="8A8A99"/>
-                </a:solidFill>
-                <a:latin typeface="Yu Gothic"/>
-                <a:ea typeface="Yu Gothic"/>
-                <a:cs typeface="Yu Gothic"/>
-              </a:rPr>
-              <a:t>差し替えてください）</a:t>
+              <a:rPr sz="1150" b="1" i="0">
+                <a:solidFill>
+                  <a:srgbClr val="3A106E"/>
+                </a:solidFill>
+                <a:latin typeface="Yu Gothic"/>
+                <a:ea typeface="Yu Gothic"/>
+                <a:cs typeface="Yu Gothic"/>
+              </a:rPr>
+              <a:t>円谷プロダクション</a:t>
+            </a:r>
+          </a:p>
+          <a:p>
+            <a:pPr algn="ctr">
+              <a:spcAft>
+                <a:spcPts val="300"/>
+              </a:spcAft>
+            </a:pPr>
+            <a:r>
+              <a:rPr sz="1150" b="1" i="0">
+                <a:solidFill>
+                  <a:srgbClr val="3A106E"/>
+                </a:solidFill>
+                <a:latin typeface="Yu Gothic"/>
+                <a:ea typeface="Yu Gothic"/>
+                <a:cs typeface="Yu Gothic"/>
+              </a:rPr>
+              <a:t>専務執行役員</a:t>
             </a:r>
           </a:p>
         </p:txBody>
@@ -31476,8 +31490,8 @@
         </p:nvSpPr>
         <p:spPr>
           <a:xfrm>
-            <a:off x="822960" y="1920240"/>
-            <a:ext cx="7223760" cy="1554480"/>
+            <a:off x="3840480" y="1783080"/>
+            <a:ext cx="7772400" cy="1828800"/>
           </a:xfrm>
           <a:prstGeom prst="rect">
             <a:avLst/>
@@ -31492,7 +31506,7 @@
           <a:p>
             <a:pPr algn="l">
               <a:spcAft>
-                <a:spcPts val="600"/>
+                <a:spcPts val="500"/>
               </a:spcAft>
             </a:pPr>
             <a:r>
@@ -31504,17 +31518,17 @@
                 <a:ea typeface="Yu Gothic"/>
                 <a:cs typeface="Yu Gothic"/>
               </a:rPr>
-              <a:t>これまで</a:t>
-            </a:r>
-          </a:p>
-          <a:p>
-            <a:pPr algn="l">
-              <a:spcAft>
-                <a:spcPts val="300"/>
-              </a:spcAft>
-            </a:pPr>
-            <a:r>
-              <a:rPr sz="1500" b="1" i="0">
+              <a:t>ご経歴</a:t>
+            </a:r>
+          </a:p>
+          <a:p>
+            <a:pPr algn="l">
+              <a:spcAft>
+                <a:spcPts val="400"/>
+              </a:spcAft>
+            </a:pPr>
+            <a:r>
+              <a:rPr sz="1050" b="0" i="0">
                 <a:solidFill>
                   <a:srgbClr val="262630"/>
                 </a:solidFill>
@@ -31522,25 +31536,7 @@
                 <a:ea typeface="Yu Gothic"/>
                 <a:cs typeface="Yu Gothic"/>
               </a:rPr>
-              <a:t>前職：株式会社プラザクリエイト　代表取締役社長</a:t>
-            </a:r>
-          </a:p>
-          <a:p>
-            <a:pPr algn="l">
-              <a:spcAft>
-                <a:spcPts val="800"/>
-              </a:spcAft>
-            </a:pPr>
-            <a:r>
-              <a:rPr sz="1250" b="0" i="0">
-                <a:solidFill>
-                  <a:srgbClr val="5F5F6E"/>
-                </a:solidFill>
-                <a:latin typeface="Yu Gothic"/>
-                <a:ea typeface="Yu Gothic"/>
-                <a:cs typeface="Yu Gothic"/>
-              </a:rPr>
-              <a:t>社長として、事業改革・組織改革に向き合ってきました</a:t>
+              <a:t>■ 広告代理店勤務を経て、株式会社リクルートへ転職</a:t>
             </a:r>
           </a:p>
           <a:p>
@@ -31550,7 +31546,7 @@
               </a:spcAft>
             </a:pPr>
             <a:r>
-              <a:rPr sz="1500" b="1" i="0">
+              <a:rPr sz="1050" b="0" i="0">
                 <a:solidFill>
                   <a:srgbClr val="262630"/>
                 </a:solidFill>
@@ -31558,7 +31554,43 @@
                 <a:ea typeface="Yu Gothic"/>
                 <a:cs typeface="Yu Gothic"/>
               </a:rPr>
-              <a:t>現在：円谷プロダクション　専務執行役員</a:t>
+              <a:t>■ リテール新規開発・カスタマーサクセス領域のマネージャーとして、3年連続MVPなど高い成果</a:t>
+            </a:r>
+          </a:p>
+          <a:p>
+            <a:pPr algn="l">
+              <a:spcAft>
+                <a:spcPts val="400"/>
+              </a:spcAft>
+            </a:pPr>
+            <a:r>
+              <a:rPr sz="1050" b="0" i="0">
+                <a:solidFill>
+                  <a:srgbClr val="262630"/>
+                </a:solidFill>
+                <a:latin typeface="Yu Gothic"/>
+                <a:ea typeface="Yu Gothic"/>
+                <a:cs typeface="Yu Gothic"/>
+              </a:rPr>
+              <a:t>■ 2019年 株式会社プラザクリエイトへ入社。取締役を経て、2022年より代表取締役社長</a:t>
+            </a:r>
+          </a:p>
+          <a:p>
+            <a:pPr algn="l">
+              <a:spcAft>
+                <a:spcPts val="400"/>
+              </a:spcAft>
+            </a:pPr>
+            <a:r>
+              <a:rPr sz="1050" b="0" i="0">
+                <a:solidFill>
+                  <a:srgbClr val="262630"/>
+                </a:solidFill>
+                <a:latin typeface="Yu Gothic"/>
+                <a:ea typeface="Yu Gothic"/>
+                <a:cs typeface="Yu Gothic"/>
+              </a:rPr>
+              <a:t>■ リテール領域の事業開発・顧客接点の最適化を強みに、同社の変革と成長を牽引</a:t>
             </a:r>
           </a:p>
         </p:txBody>
@@ -31571,8 +31603,8 @@
         </p:nvSpPr>
         <p:spPr>
           <a:xfrm>
-            <a:off x="822960" y="3611880"/>
-            <a:ext cx="7223760" cy="365760"/>
+            <a:off x="3840480" y="3611880"/>
+            <a:ext cx="7772400" cy="320040"/>
           </a:xfrm>
           <a:prstGeom prst="rect">
             <a:avLst/>
@@ -31599,7 +31631,7 @@
                 <a:ea typeface="Yu Gothic"/>
                 <a:cs typeface="Yu Gothic"/>
               </a:rPr>
-              <a:t>仕事で大切にしていること</a:t>
+              <a:t>仕事において大切にしていること</a:t>
             </a:r>
           </a:p>
         </p:txBody>
@@ -31612,8 +31644,8 @@
         </p:nvSpPr>
         <p:spPr>
           <a:xfrm>
-            <a:off x="822960" y="4023360"/>
-            <a:ext cx="2240280" cy="777240"/>
+            <a:off x="3840480" y="3977639"/>
+            <a:ext cx="2468880" cy="1143000"/>
           </a:xfrm>
           <a:prstGeom prst="roundRect">
             <a:avLst/>
@@ -31658,8 +31690,8 @@
         </p:nvSpPr>
         <p:spPr>
           <a:xfrm>
-            <a:off x="822960" y="4023360"/>
-            <a:ext cx="2240280" cy="777240"/>
+            <a:off x="3840480" y="4069080"/>
+            <a:ext cx="2468880" cy="365760"/>
           </a:xfrm>
           <a:prstGeom prst="rect">
             <a:avLst/>
@@ -31678,7 +31710,7 @@
               </a:spcAft>
             </a:pPr>
             <a:r>
-              <a:rPr sz="1400" b="1" i="0">
+              <a:rPr sz="1250" b="1" i="0">
                 <a:solidFill>
                   <a:srgbClr val="3A106E"/>
                 </a:solidFill>
@@ -31693,14 +31725,73 @@
       </p:sp>
       <p:sp>
         <p:nvSpPr>
-          <p:cNvPr id="11" name="Rounded Rectangle 10"/>
+          <p:cNvPr id="11" name="TextBox 10"/>
+          <p:cNvSpPr txBox="1"/>
+          <p:nvPr/>
+        </p:nvSpPr>
+        <p:spPr>
+          <a:xfrm>
+            <a:off x="3977640" y="4434840"/>
+            <a:ext cx="2194560" cy="640080"/>
+          </a:xfrm>
+          <a:prstGeom prst="rect">
+            <a:avLst/>
+          </a:prstGeom>
+          <a:noFill/>
+        </p:spPr>
+        <p:txBody>
+          <a:bodyPr wrap="square" lIns="0" rIns="0" tIns="0" bIns="0">
+            <a:spAutoFit/>
+          </a:bodyPr>
+          <a:lstStyle/>
+          <a:p>
+            <a:pPr algn="ctr">
+              <a:spcAft>
+                <a:spcPts val="100"/>
+              </a:spcAft>
+            </a:pPr>
+            <a:r>
+              <a:rPr sz="850" b="0" i="0">
+                <a:solidFill>
+                  <a:srgbClr val="5F5F6E"/>
+                </a:solidFill>
+                <a:latin typeface="Yu Gothic"/>
+                <a:ea typeface="Yu Gothic"/>
+                <a:cs typeface="Yu Gothic"/>
+              </a:rPr>
+              <a:t>常に現状に満足せず、</a:t>
+            </a:r>
+          </a:p>
+          <a:p>
+            <a:pPr algn="ctr">
+              <a:spcAft>
+                <a:spcPts val="100"/>
+              </a:spcAft>
+            </a:pPr>
+            <a:r>
+              <a:rPr sz="850" b="0" i="0">
+                <a:solidFill>
+                  <a:srgbClr val="5F5F6E"/>
+                </a:solidFill>
+                <a:latin typeface="Yu Gothic"/>
+                <a:ea typeface="Yu Gothic"/>
+                <a:cs typeface="Yu Gothic"/>
+              </a:rPr>
+              <a:t>新しい価値を創り出す</a:t>
+            </a:r>
+          </a:p>
+        </p:txBody>
+      </p:sp>
+      <p:sp>
+        <p:nvSpPr>
+          <p:cNvPr id="12" name="Rounded Rectangle 11"/>
           <p:cNvSpPr/>
           <p:nvPr/>
         </p:nvSpPr>
         <p:spPr>
           <a:xfrm>
-            <a:off x="3246120" y="4023360"/>
-            <a:ext cx="2240280" cy="777240"/>
+            <a:off x="6492240" y="3977639"/>
+            <a:ext cx="2468880" cy="1143000"/>
           </a:xfrm>
           <a:prstGeom prst="roundRect">
             <a:avLst/>
@@ -31739,14 +31830,14 @@
       </p:sp>
       <p:sp>
         <p:nvSpPr>
-          <p:cNvPr id="12" name="TextBox 11"/>
+          <p:cNvPr id="13" name="TextBox 12"/>
           <p:cNvSpPr txBox="1"/>
           <p:nvPr/>
         </p:nvSpPr>
         <p:spPr>
           <a:xfrm>
-            <a:off x="3246120" y="4023360"/>
-            <a:ext cx="2240280" cy="777240"/>
+            <a:off x="6492240" y="4069080"/>
+            <a:ext cx="2468880" cy="365760"/>
           </a:xfrm>
           <a:prstGeom prst="rect">
             <a:avLst/>
@@ -31765,7 +31856,7 @@
               </a:spcAft>
             </a:pPr>
             <a:r>
-              <a:rPr sz="1400" b="1" i="0">
+              <a:rPr sz="1250" b="1" i="0">
                 <a:solidFill>
                   <a:srgbClr val="3A106E"/>
                 </a:solidFill>
@@ -31780,14 +31871,73 @@
       </p:sp>
       <p:sp>
         <p:nvSpPr>
-          <p:cNvPr id="13" name="Rounded Rectangle 12"/>
+          <p:cNvPr id="14" name="TextBox 13"/>
+          <p:cNvSpPr txBox="1"/>
+          <p:nvPr/>
+        </p:nvSpPr>
+        <p:spPr>
+          <a:xfrm>
+            <a:off x="6629400" y="4434840"/>
+            <a:ext cx="2194560" cy="640080"/>
+          </a:xfrm>
+          <a:prstGeom prst="rect">
+            <a:avLst/>
+          </a:prstGeom>
+          <a:noFill/>
+        </p:spPr>
+        <p:txBody>
+          <a:bodyPr wrap="square" lIns="0" rIns="0" tIns="0" bIns="0">
+            <a:spAutoFit/>
+          </a:bodyPr>
+          <a:lstStyle/>
+          <a:p>
+            <a:pPr algn="ctr">
+              <a:spcAft>
+                <a:spcPts val="100"/>
+              </a:spcAft>
+            </a:pPr>
+            <a:r>
+              <a:rPr sz="850" b="0" i="0">
+                <a:solidFill>
+                  <a:srgbClr val="5F5F6E"/>
+                </a:solidFill>
+                <a:latin typeface="Yu Gothic"/>
+                <a:ea typeface="Yu Gothic"/>
+                <a:cs typeface="Yu Gothic"/>
+              </a:rPr>
+              <a:t>「お客様が何を求めているか」を</a:t>
+            </a:r>
+          </a:p>
+          <a:p>
+            <a:pPr algn="ctr">
+              <a:spcAft>
+                <a:spcPts val="100"/>
+              </a:spcAft>
+            </a:pPr>
+            <a:r>
+              <a:rPr sz="850" b="0" i="0">
+                <a:solidFill>
+                  <a:srgbClr val="5F5F6E"/>
+                </a:solidFill>
+                <a:latin typeface="Yu Gothic"/>
+                <a:ea typeface="Yu Gothic"/>
+                <a:cs typeface="Yu Gothic"/>
+              </a:rPr>
+              <a:t>必ず起点に設計する</a:t>
+            </a:r>
+          </a:p>
+        </p:txBody>
+      </p:sp>
+      <p:sp>
+        <p:nvSpPr>
+          <p:cNvPr id="15" name="Rounded Rectangle 14"/>
           <p:cNvSpPr/>
           <p:nvPr/>
         </p:nvSpPr>
         <p:spPr>
           <a:xfrm>
-            <a:off x="5669280" y="4023360"/>
-            <a:ext cx="2240280" cy="777240"/>
+            <a:off x="9144000" y="3977639"/>
+            <a:ext cx="2468880" cy="1143000"/>
           </a:xfrm>
           <a:prstGeom prst="roundRect">
             <a:avLst/>
@@ -31826,14 +31976,14 @@
       </p:sp>
       <p:sp>
         <p:nvSpPr>
-          <p:cNvPr id="14" name="TextBox 13"/>
+          <p:cNvPr id="16" name="TextBox 15"/>
           <p:cNvSpPr txBox="1"/>
           <p:nvPr/>
         </p:nvSpPr>
         <p:spPr>
           <a:xfrm>
-            <a:off x="5669280" y="4023360"/>
-            <a:ext cx="2240280" cy="777240"/>
+            <a:off x="9144000" y="4069080"/>
+            <a:ext cx="2468880" cy="365760"/>
           </a:xfrm>
           <a:prstGeom prst="rect">
             <a:avLst/>
@@ -31852,7 +32002,7 @@
               </a:spcAft>
             </a:pPr>
             <a:r>
-              <a:rPr sz="1400" b="1" i="0">
+              <a:rPr sz="1250" b="1" i="0">
                 <a:solidFill>
                   <a:srgbClr val="3A106E"/>
                 </a:solidFill>
@@ -31867,14 +32017,14 @@
       </p:sp>
       <p:sp>
         <p:nvSpPr>
-          <p:cNvPr id="15" name="TextBox 14"/>
+          <p:cNvPr id="17" name="TextBox 16"/>
           <p:cNvSpPr txBox="1"/>
           <p:nvPr/>
         </p:nvSpPr>
         <p:spPr>
           <a:xfrm>
-            <a:off x="822960" y="5029200"/>
-            <a:ext cx="7223760" cy="640080"/>
+            <a:off x="9281160" y="4434840"/>
+            <a:ext cx="2194560" cy="640080"/>
           </a:xfrm>
           <a:prstGeom prst="rect">
             <a:avLst/>
@@ -31887,23 +32037,64 @@
           </a:bodyPr>
           <a:lstStyle/>
           <a:p>
-            <a:pPr algn="l">
-              <a:spcAft>
-                <a:spcPts val="300"/>
-              </a:spcAft>
-            </a:pPr>
-            <a:r>
-              <a:rPr sz="1200" b="0" i="0">
-                <a:solidFill>
-                  <a:srgbClr val="262630"/>
-                </a:solidFill>
-                <a:latin typeface="Yu Gothic"/>
-                <a:ea typeface="Yu Gothic"/>
-                <a:cs typeface="Yu Gothic"/>
-              </a:rPr>
-              <a:t>前職で強く感じていたのは「このままでは会社は変わらない」という危機感。</a:t>
-            </a:r>
-          </a:p>
+            <a:pPr algn="ctr">
+              <a:spcAft>
+                <a:spcPts val="100"/>
+              </a:spcAft>
+            </a:pPr>
+            <a:r>
+              <a:rPr sz="850" b="0" i="0">
+                <a:solidFill>
+                  <a:srgbClr val="5F5F6E"/>
+                </a:solidFill>
+                <a:latin typeface="Yu Gothic"/>
+                <a:ea typeface="Yu Gothic"/>
+                <a:cs typeface="Yu Gothic"/>
+              </a:rPr>
+              <a:t>個人の成果ではなく、チーム全体で</a:t>
+            </a:r>
+          </a:p>
+          <a:p>
+            <a:pPr algn="ctr">
+              <a:spcAft>
+                <a:spcPts val="100"/>
+              </a:spcAft>
+            </a:pPr>
+            <a:r>
+              <a:rPr sz="850" b="0" i="0">
+                <a:solidFill>
+                  <a:srgbClr val="5F5F6E"/>
+                </a:solidFill>
+                <a:latin typeface="Yu Gothic"/>
+                <a:ea typeface="Yu Gothic"/>
+                <a:cs typeface="Yu Gothic"/>
+              </a:rPr>
+              <a:t>価値を高め合う組織づくり</a:t>
+            </a:r>
+          </a:p>
+        </p:txBody>
+      </p:sp>
+      <p:sp>
+        <p:nvSpPr>
+          <p:cNvPr id="18" name="TextBox 17"/>
+          <p:cNvSpPr txBox="1"/>
+          <p:nvPr/>
+        </p:nvSpPr>
+        <p:spPr>
+          <a:xfrm>
+            <a:off x="3840480" y="5257800"/>
+            <a:ext cx="7772400" cy="502920"/>
+          </a:xfrm>
+          <a:prstGeom prst="rect">
+            <a:avLst/>
+          </a:prstGeom>
+          <a:noFill/>
+        </p:spPr>
+        <p:txBody>
+          <a:bodyPr wrap="square" lIns="0" rIns="0" tIns="0" bIns="0">
+            <a:spAutoFit/>
+          </a:bodyPr>
+          <a:lstStyle/>
           <a:p>
             <a:pPr algn="l">
               <a:spcAft>
@@ -31911,22 +32102,33 @@
               </a:spcAft>
             </a:pPr>
             <a:r>
-              <a:rPr sz="1200" b="0" i="0">
-                <a:solidFill>
-                  <a:srgbClr val="262630"/>
-                </a:solidFill>
-                <a:latin typeface="Yu Gothic"/>
-                <a:ea typeface="Yu Gothic"/>
-                <a:cs typeface="Yu Gothic"/>
-              </a:rPr>
-              <a:t>ただし危機感は、ネガティブなものではなく、会社を前に進めるエネルギーだと思っています。</a:t>
-            </a:r>
-          </a:p>
-        </p:txBody>
-      </p:sp>
-      <p:sp>
-        <p:nvSpPr>
-          <p:cNvPr id="16" name="Rectangle 15"/>
+              <a:rPr sz="1200" b="1" i="0">
+                <a:solidFill>
+                  <a:srgbClr val="7823DC"/>
+                </a:solidFill>
+                <a:latin typeface="Yu Gothic"/>
+                <a:ea typeface="Yu Gothic"/>
+                <a:cs typeface="Yu Gothic"/>
+              </a:rPr>
+              <a:t>座右の銘　</a:t>
+            </a:r>
+            <a:r>
+              <a:rPr sz="1200" b="1" i="0">
+                <a:solidFill>
+                  <a:srgbClr val="3A106E"/>
+                </a:solidFill>
+                <a:latin typeface="Yu Gothic"/>
+                <a:ea typeface="Yu Gothic"/>
+                <a:cs typeface="Yu Gothic"/>
+              </a:rPr>
+              <a:t>「One for All, All for One」— 一人はみんなのために、みんなは一つの目的のために</a:t>
+            </a:r>
+          </a:p>
+        </p:txBody>
+      </p:sp>
+      <p:sp>
+        <p:nvSpPr>
+          <p:cNvPr id="19" name="Rectangle 18"/>
           <p:cNvSpPr/>
           <p:nvPr/>
         </p:nvSpPr>
@@ -31970,7 +32172,7 @@
       </p:sp>
       <p:sp>
         <p:nvSpPr>
-          <p:cNvPr id="17" name="Rectangle 16"/>
+          <p:cNvPr id="20" name="Rectangle 19"/>
           <p:cNvSpPr/>
           <p:nvPr/>
         </p:nvSpPr>
@@ -32014,7 +32216,7 @@
       </p:sp>
       <p:sp>
         <p:nvSpPr>
-          <p:cNvPr id="18" name="TextBox 17"/>
+          <p:cNvPr id="21" name="TextBox 20"/>
           <p:cNvSpPr txBox="1"/>
           <p:nvPr/>
         </p:nvSpPr>
@@ -32048,14 +32250,14 @@
                 <a:ea typeface="Yu Gothic"/>
                 <a:cs typeface="Yu Gothic"/>
               </a:rPr>
-              <a:t>これは、円谷でもまったく同じだと思っています</a:t>
-            </a:r>
-          </a:p>
-        </p:txBody>
-      </p:sp>
-      <p:sp>
-        <p:nvSpPr>
-          <p:cNvPr id="19" name="Rectangle 18"/>
+              <a:t>前職で感じた「このままでは変わらない」という危機感——それは会社を前に進めるエネルギー。円谷でも同じ思いです</a:t>
+            </a:r>
+          </a:p>
+        </p:txBody>
+      </p:sp>
+      <p:sp>
+        <p:nvSpPr>
+          <p:cNvPr id="22" name="Rectangle 21"/>
           <p:cNvSpPr/>
           <p:nvPr/>
         </p:nvSpPr>
@@ -32099,7 +32301,7 @@
       </p:sp>
       <p:sp>
         <p:nvSpPr>
-          <p:cNvPr id="20" name="TextBox 19"/>
+          <p:cNvPr id="23" name="TextBox 22"/>
           <p:cNvSpPr txBox="1"/>
           <p:nvPr/>
         </p:nvSpPr>
